--- a/docs/presentaciones/classes/clase-052-testing-validacion-hyperparameter-tuning-no-free-lunch-theorem-presentacion.pptx
+++ b/docs/presentaciones/classes/clase-052-testing-validacion-hyperparameter-tuning-no-free-lunch-theorem-presentacion.pptx
@@ -4933,7 +4933,7 @@
                 </a:solidFill>
                 <a:latin typeface="Segoe UI"/>
               </a:rPr>
-              <a:t>Primer bloque ejecutable del notebook.</a:t>
+              <a:t>Medir generalización sin engañarse: hold-out vs cross-validation, StratifiedKFold, GridSearchCV/RandomizedSearchCV dentro de un Pipeline, y el no free lunch theorem. Requiere: numpy, pandas, scipy, scikit-learn, matplotlib.</a:t>
             </a:r>
           </a:p>
         </p:txBody>
@@ -5020,7 +5020,330 @@
                 </a:solidFill>
                 <a:latin typeface="Courier New"/>
               </a:rPr>
-              <a:t># Imports y configuración inicial</a:t>
+              <a:t>import numpy as np</a:t>
+            </a:r>
+          </a:p>
+          <a:p>
+            <a:pPr>
+              <a:defRPr sz="1200" b="0">
+                <a:solidFill>
+                  <a:srgbClr val="F8FAFC"/>
+                </a:solidFill>
+                <a:latin typeface="Courier New"/>
+              </a:defRPr>
+            </a:pPr>
+            <a:r>
+              <a:rPr sz="1200" b="0">
+                <a:solidFill>
+                  <a:srgbClr val="F8FAFC"/>
+                </a:solidFill>
+                <a:latin typeface="Courier New"/>
+              </a:rPr>
+              <a:t>import pandas as pd</a:t>
+            </a:r>
+          </a:p>
+          <a:p>
+            <a:pPr>
+              <a:defRPr sz="1200" b="0">
+                <a:solidFill>
+                  <a:srgbClr val="F8FAFC"/>
+                </a:solidFill>
+                <a:latin typeface="Courier New"/>
+              </a:defRPr>
+            </a:pPr>
+            <a:r>
+              <a:rPr sz="1200" b="0">
+                <a:solidFill>
+                  <a:srgbClr val="F8FAFC"/>
+                </a:solidFill>
+                <a:latin typeface="Courier New"/>
+              </a:rPr>
+              <a:t>import matplotlib.pyplot as plt</a:t>
+            </a:r>
+          </a:p>
+          <a:p>
+            <a:pPr>
+              <a:defRPr sz="1200" b="0">
+                <a:solidFill>
+                  <a:srgbClr val="F8FAFC"/>
+                </a:solidFill>
+                <a:latin typeface="Courier New"/>
+              </a:defRPr>
+            </a:pPr>
+            <a:r>
+              <a:rPr sz="1200" b="0">
+                <a:solidFill>
+                  <a:srgbClr val="F8FAFC"/>
+                </a:solidFill>
+                <a:latin typeface="Courier New"/>
+              </a:rPr>
+              <a:t>from scipy.stats import loguniform</a:t>
+            </a:r>
+          </a:p>
+          <a:p>
+            <a:pPr>
+              <a:defRPr sz="1200" b="0">
+                <a:solidFill>
+                  <a:srgbClr val="F8FAFC"/>
+                </a:solidFill>
+                <a:latin typeface="Courier New"/>
+              </a:defRPr>
+            </a:pPr>
+            <a:r>
+              <a:rPr sz="1200" b="0">
+                <a:solidFill>
+                  <a:srgbClr val="F8FAFC"/>
+                </a:solidFill>
+                <a:latin typeface="Courier New"/>
+              </a:rPr>
+              <a:t>from sklearn.datasets import load_breast_cancer, make_classification</a:t>
+            </a:r>
+          </a:p>
+          <a:p>
+            <a:pPr>
+              <a:defRPr sz="1200" b="0">
+                <a:solidFill>
+                  <a:srgbClr val="F8FAFC"/>
+                </a:solidFill>
+                <a:latin typeface="Courier New"/>
+              </a:defRPr>
+            </a:pPr>
+            <a:r>
+              <a:rPr sz="1200" b="0">
+                <a:solidFill>
+                  <a:srgbClr val="F8FAFC"/>
+                </a:solidFill>
+                <a:latin typeface="Courier New"/>
+              </a:rPr>
+              <a:t>from sklearn.model_selection import (train_test_split, cross_val_score, KFold,</a:t>
+            </a:r>
+          </a:p>
+          <a:p>
+            <a:pPr>
+              <a:defRPr sz="1200" b="0">
+                <a:solidFill>
+                  <a:srgbClr val="F8FAFC"/>
+                </a:solidFill>
+                <a:latin typeface="Courier New"/>
+              </a:defRPr>
+            </a:pPr>
+            <a:r>
+              <a:rPr sz="1200" b="0">
+                <a:solidFill>
+                  <a:srgbClr val="F8FAFC"/>
+                </a:solidFill>
+                <a:latin typeface="Courier New"/>
+              </a:rPr>
+              <a:t>                                     StratifiedKFold, GridSearchCV, RandomizedSearchCV)</a:t>
+            </a:r>
+          </a:p>
+          <a:p>
+            <a:pPr>
+              <a:defRPr sz="1200" b="0">
+                <a:solidFill>
+                  <a:srgbClr val="F8FAFC"/>
+                </a:solidFill>
+                <a:latin typeface="Courier New"/>
+              </a:defRPr>
+            </a:pPr>
+            <a:r>
+              <a:rPr sz="1200" b="0">
+                <a:solidFill>
+                  <a:srgbClr val="F8FAFC"/>
+                </a:solidFill>
+                <a:latin typeface="Courier New"/>
+              </a:rPr>
+              <a:t>from sklearn.pipeline import Pipeline</a:t>
+            </a:r>
+          </a:p>
+          <a:p>
+            <a:pPr>
+              <a:defRPr sz="1200" b="0">
+                <a:solidFill>
+                  <a:srgbClr val="F8FAFC"/>
+                </a:solidFill>
+                <a:latin typeface="Courier New"/>
+              </a:defRPr>
+            </a:pPr>
+            <a:r>
+              <a:rPr sz="1200" b="0">
+                <a:solidFill>
+                  <a:srgbClr val="F8FAFC"/>
+                </a:solidFill>
+                <a:latin typeface="Courier New"/>
+              </a:rPr>
+              <a:t>from sklearn.preprocessing import StandardScaler</a:t>
+            </a:r>
+          </a:p>
+          <a:p>
+            <a:pPr>
+              <a:defRPr sz="1200" b="0">
+                <a:solidFill>
+                  <a:srgbClr val="F8FAFC"/>
+                </a:solidFill>
+                <a:latin typeface="Courier New"/>
+              </a:defRPr>
+            </a:pPr>
+            <a:r>
+              <a:rPr sz="1200" b="0">
+                <a:solidFill>
+                  <a:srgbClr val="F8FAFC"/>
+                </a:solidFill>
+                <a:latin typeface="Courier New"/>
+              </a:rPr>
+              <a:t>from sklearn.svm import SVC</a:t>
+            </a:r>
+          </a:p>
+          <a:p>
+            <a:pPr>
+              <a:defRPr sz="1200" b="0">
+                <a:solidFill>
+                  <a:srgbClr val="F8FAFC"/>
+                </a:solidFill>
+                <a:latin typeface="Courier New"/>
+              </a:defRPr>
+            </a:pPr>
+            <a:r>
+              <a:rPr sz="1200" b="0">
+                <a:solidFill>
+                  <a:srgbClr val="F8FAFC"/>
+                </a:solidFill>
+                <a:latin typeface="Courier New"/>
+              </a:rPr>
+              <a:t>from sklearn.linear_model import LogisticRegression</a:t>
+            </a:r>
+          </a:p>
+          <a:p>
+            <a:pPr>
+              <a:defRPr sz="1200" b="0">
+                <a:solidFill>
+                  <a:srgbClr val="F8FAFC"/>
+                </a:solidFill>
+                <a:latin typeface="Courier New"/>
+              </a:defRPr>
+            </a:pPr>
+            <a:r>
+              <a:rPr sz="1200" b="0">
+                <a:solidFill>
+                  <a:srgbClr val="F8FAFC"/>
+                </a:solidFill>
+                <a:latin typeface="Courier New"/>
+              </a:rPr>
+              <a:t>from sklearn.ensemble import RandomForestClassifier</a:t>
+            </a:r>
+          </a:p>
+          <a:p>
+            <a:pPr>
+              <a:defRPr sz="1200" b="0">
+                <a:solidFill>
+                  <a:srgbClr val="F8FAFC"/>
+                </a:solidFill>
+                <a:latin typeface="Courier New"/>
+              </a:defRPr>
+            </a:pPr>
+            <a:r>
+              <a:rPr sz="1200" b="0">
+                <a:solidFill>
+                  <a:srgbClr val="F8FAFC"/>
+                </a:solidFill>
+                <a:latin typeface="Courier New"/>
+              </a:rPr>
+              <a:t>from sklearn.dummy import DummyClassifier</a:t>
+            </a:r>
+          </a:p>
+          <a:p>
+            <a:pPr>
+              <a:defRPr sz="1200" b="0">
+                <a:solidFill>
+                  <a:srgbClr val="F8FAFC"/>
+                </a:solidFill>
+                <a:latin typeface="Courier New"/>
+              </a:defRPr>
+            </a:pPr>
+            <a:r>
+              <a:rPr sz="1200" b="0">
+                <a:solidFill>
+                  <a:srgbClr val="F8FAFC"/>
+                </a:solidFill>
+                <a:latin typeface="Courier New"/>
+              </a:rPr>
+              <a:t> </a:t>
+            </a:r>
+          </a:p>
+          <a:p>
+            <a:pPr>
+              <a:defRPr sz="1200" b="0">
+                <a:solidFill>
+                  <a:srgbClr val="F8FAFC"/>
+                </a:solidFill>
+                <a:latin typeface="Courier New"/>
+              </a:defRPr>
+            </a:pPr>
+            <a:r>
+              <a:rPr sz="1200" b="0">
+                <a:solidFill>
+                  <a:srgbClr val="F8FAFC"/>
+                </a:solidFill>
+                <a:latin typeface="Courier New"/>
+              </a:rPr>
+              <a:t>np.random.seed(42)</a:t>
+            </a:r>
+          </a:p>
+          <a:p>
+            <a:pPr>
+              <a:defRPr sz="1200" b="0">
+                <a:solidFill>
+                  <a:srgbClr val="F8FAFC"/>
+                </a:solidFill>
+                <a:latin typeface="Courier New"/>
+              </a:defRPr>
+            </a:pPr>
+            <a:r>
+              <a:rPr sz="1200" b="0">
+                <a:solidFill>
+                  <a:srgbClr val="F8FAFC"/>
+                </a:solidFill>
+                <a:latin typeface="Courier New"/>
+              </a:rPr>
+              <a:t>data = load_breast_cancer()</a:t>
+            </a:r>
+          </a:p>
+          <a:p>
+            <a:pPr>
+              <a:defRPr sz="1200" b="0">
+                <a:solidFill>
+                  <a:srgbClr val="F8FAFC"/>
+                </a:solidFill>
+                <a:latin typeface="Courier New"/>
+              </a:defRPr>
+            </a:pPr>
+            <a:r>
+              <a:rPr sz="1200" b="0">
+                <a:solidFill>
+                  <a:srgbClr val="F8FAFC"/>
+                </a:solidFill>
+                <a:latin typeface="Courier New"/>
+              </a:rPr>
+              <a:t>X, y = data.data, data.target</a:t>
+            </a:r>
+          </a:p>
+          <a:p>
+            <a:pPr>
+              <a:defRPr sz="1200" b="0">
+                <a:solidFill>
+                  <a:srgbClr val="F8FAFC"/>
+                </a:solidFill>
+                <a:latin typeface="Courier New"/>
+              </a:defRPr>
+            </a:pPr>
+            <a:r>
+              <a:rPr sz="1200" b="0">
+                <a:solidFill>
+                  <a:srgbClr val="F8FAFC"/>
+                </a:solidFill>
+                <a:latin typeface="Courier New"/>
+              </a:rPr>
+              <a:t>print('breast_cancer:', X.shape, 'clases', np.bincount(y))</a:t>
             </a:r>
           </a:p>
         </p:txBody>

--- a/docs/presentaciones/classes/clase-052-testing-validacion-hyperparameter-tuning-no-free-lunch-theorem-presentacion.pptx
+++ b/docs/presentaciones/classes/clase-052-testing-validacion-hyperparameter-tuning-no-free-lunch-theorem-presentacion.pptx
@@ -3272,7 +3272,7 @@
                 </a:solidFill>
                 <a:latin typeface="Segoe UI"/>
               </a:rPr>
-              <a:t>Parte: 1 — Machine Learning Clásico · Fuente: Géron, cap. 2 + sklearn user guide.  Duración estimada: 70 min.</a:t>
+              <a:t>Parte: 1 — Machine Learning Clásico · Fuente: Géron, cap. 2 + sklearn user guide.  Duración estimada: 70 min. · Nivel: Básico-Intermedio</a:t>
             </a:r>
           </a:p>
         </p:txBody>
@@ -3581,7 +3581,7 @@
                 </a:solidFill>
                 <a:latin typeface="Segoe UI"/>
               </a:rPr>
-              <a:t>Parte: 1 — Machine Learning Clásico · Fuente: Géron, cap. 2 + sklearn user guide.  Duración estimada: 70 min.</a:t>
+              <a:t>Parte: 1 — Machine Learning Clásico · Fuente: Géron, cap. 2 + sklearn user guide.  Duración estimada: 70 min. · Nivel: Básico-Intermedio</a:t>
             </a:r>
           </a:p>
         </p:txBody>
